--- a/madd-decks/dagger-alif/04-dal-dhal.pptx
+++ b/madd-decks/dagger-alif/04-dal-dhal.pptx
@@ -4,6 +4,9 @@
   <p:sldMasterIdLst>
     <p:sldMasterId id="2147483648" r:id="rId1"/>
   </p:sldMasterIdLst>
+  <p:notesMasterIdLst>
+    <p:notesMasterId r:id="rId25"/>
+  </p:notesMasterIdLst>
   <p:sldIdLst>
     <p:sldId id="256" r:id="rId2"/>
     <p:sldId id="257" r:id="rId3"/>
@@ -29,9 +32,6 @@
     <p:sldId id="277" r:id="rId23"/>
     <p:sldId id="278" r:id="rId24"/>
   </p:sldIdLst>
-  <p:notesMasterIdLst>
-    <p:notesMasterId r:id="rId25"/>
-  </p:notesMasterIdLst>
   <p:sldSz cx="9144000" cy="5143500"/>
   <p:notesSz cx="5143500" cy="9144000"/>
   <p:defaultTextStyle>
@@ -4666,9 +4666,6 @@
               </a:rPr>
               <a:t>هَذَ</a:t>
             </a:r>
-            <a:pPr algn="ctr" indent="0" marL="0">
-              <a:buNone/>
-            </a:pPr>
             <a:r>
               <a:rPr lang="ar-SA" altLang="en-US" sz="5850" dirty="0">
                 <a:solidFill>
@@ -6091,9 +6088,6 @@
               </a:rPr>
               <a:t>كَذَ</a:t>
             </a:r>
-            <a:pPr algn="ctr" indent="0" marL="0">
-              <a:buNone/>
-            </a:pPr>
             <a:r>
               <a:rPr lang="ar-SA" altLang="en-US" sz="5850" dirty="0">
                 <a:solidFill>
@@ -7516,9 +7510,6 @@
               </a:rPr>
               <a:t>ذَ</a:t>
             </a:r>
-            <a:pPr algn="ctr" indent="0" marL="0">
-              <a:buNone/>
-            </a:pPr>
             <a:r>
               <a:rPr lang="ar-SA" altLang="en-US" sz="5850" dirty="0">
                 <a:solidFill>
@@ -7530,9 +7521,6 @@
               </a:rPr>
               <a:t>ا</a:t>
             </a:r>
-            <a:pPr algn="ctr" indent="0" marL="0">
-              <a:buNone/>
-            </a:pPr>
             <a:r>
               <a:rPr lang="ar-SA" altLang="en-US" sz="9000" dirty="0">
                 <a:solidFill>
@@ -8955,9 +8943,6 @@
               </a:rPr>
               <a:t>ذَ</a:t>
             </a:r>
-            <a:pPr algn="ctr" indent="0" marL="0">
-              <a:buNone/>
-            </a:pPr>
             <a:r>
               <a:rPr lang="ar-SA" altLang="en-US" sz="5850" dirty="0">
                 <a:solidFill>
@@ -8969,9 +8954,6 @@
               </a:rPr>
               <a:t>ا</a:t>
             </a:r>
-            <a:pPr algn="ctr" indent="0" marL="0">
-              <a:buNone/>
-            </a:pPr>
             <a:r>
               <a:rPr lang="ar-SA" altLang="en-US" sz="9000" dirty="0">
                 <a:solidFill>
@@ -10394,9 +10376,6 @@
               </a:rPr>
               <a:t>ذَ</a:t>
             </a:r>
-            <a:pPr algn="ctr" indent="0" marL="0">
-              <a:buNone/>
-            </a:pPr>
             <a:r>
               <a:rPr lang="ar-SA" altLang="en-US" sz="5850" dirty="0">
                 <a:solidFill>
@@ -10408,9 +10387,6 @@
               </a:rPr>
               <a:t>ا</a:t>
             </a:r>
-            <a:pPr algn="ctr" indent="0" marL="0">
-              <a:buNone/>
-            </a:pPr>
             <a:r>
               <a:rPr lang="ar-SA" altLang="en-US" sz="9000" dirty="0">
                 <a:solidFill>
@@ -11961,9 +11937,6 @@
               </a:rPr>
               <a:t>سَجَدَ</a:t>
             </a:r>
-            <a:pPr algn="ctr" indent="0" marL="0">
-              <a:buNone/>
-            </a:pPr>
             <a:r>
               <a:rPr lang="ar-SA" altLang="en-US" sz="4290" dirty="0">
                 <a:solidFill>
@@ -13676,9 +13649,6 @@
               </a:rPr>
               <a:t>عَبَدَ</a:t>
             </a:r>
-            <a:pPr algn="ctr" indent="0" marL="0">
-              <a:buNone/>
-            </a:pPr>
             <a:r>
               <a:rPr lang="ar-SA" altLang="en-US" sz="4290" dirty="0">
                 <a:solidFill>
@@ -15391,9 +15361,6 @@
               </a:rPr>
               <a:t>وَعَدَ</a:t>
             </a:r>
-            <a:pPr algn="ctr" indent="0" marL="0">
-              <a:buNone/>
-            </a:pPr>
             <a:r>
               <a:rPr lang="ar-SA" altLang="en-US" sz="4290" dirty="0">
                 <a:solidFill>
@@ -17106,9 +17073,6 @@
               </a:rPr>
               <a:t>قَصَدَ</a:t>
             </a:r>
-            <a:pPr algn="ctr" indent="0" marL="0">
-              <a:buNone/>
-            </a:pPr>
             <a:r>
               <a:rPr lang="ar-SA" altLang="en-US" sz="4290" dirty="0">
                 <a:solidFill>
@@ -18821,9 +18785,6 @@
               </a:rPr>
               <a:t>دَ</a:t>
             </a:r>
-            <a:pPr algn="ctr" indent="0" marL="0">
-              <a:buNone/>
-            </a:pPr>
             <a:r>
               <a:rPr lang="ar-SA" altLang="en-US" sz="4290" dirty="0">
                 <a:solidFill>
@@ -18835,9 +18796,6 @@
               </a:rPr>
               <a:t>ا</a:t>
             </a:r>
-            <a:pPr algn="ctr" indent="0" marL="0">
-              <a:buNone/>
-            </a:pPr>
             <a:r>
               <a:rPr lang="ar-SA" altLang="en-US" sz="6600" dirty="0">
                 <a:solidFill>
@@ -20422,9 +20380,6 @@
               </a:rPr>
               <a:t>بَدَ</a:t>
             </a:r>
-            <a:pPr algn="ctr" indent="0" marL="0">
-              <a:buNone/>
-            </a:pPr>
             <a:r>
               <a:rPr lang="ar-SA" altLang="en-US" sz="5850" dirty="0">
                 <a:solidFill>
@@ -21975,9 +21930,6 @@
               </a:rPr>
               <a:t>دَ</a:t>
             </a:r>
-            <a:pPr algn="ctr" indent="0" marL="0">
-              <a:buNone/>
-            </a:pPr>
             <a:r>
               <a:rPr lang="ar-SA" altLang="en-US" sz="4290" dirty="0">
                 <a:solidFill>
@@ -21989,9 +21941,6 @@
               </a:rPr>
               <a:t>ا</a:t>
             </a:r>
-            <a:pPr algn="ctr" indent="0" marL="0">
-              <a:buNone/>
-            </a:pPr>
             <a:r>
               <a:rPr lang="ar-SA" altLang="en-US" sz="6600" dirty="0">
                 <a:solidFill>
@@ -23704,9 +23653,6 @@
               </a:rPr>
               <a:t>أَخَذَ</a:t>
             </a:r>
-            <a:pPr algn="ctr" indent="0" marL="0">
-              <a:buNone/>
-            </a:pPr>
             <a:r>
               <a:rPr lang="ar-SA" altLang="en-US" sz="4290" dirty="0">
                 <a:solidFill>
@@ -25419,9 +25365,6 @@
               </a:rPr>
               <a:t>نَبَذَ</a:t>
             </a:r>
-            <a:pPr algn="ctr" indent="0" marL="0">
-              <a:buNone/>
-            </a:pPr>
             <a:r>
               <a:rPr lang="ar-SA" altLang="en-US" sz="4290" dirty="0">
                 <a:solidFill>
@@ -27134,9 +27077,6 @@
               </a:rPr>
               <a:t>ذَ</a:t>
             </a:r>
-            <a:pPr algn="ctr" indent="0" marL="0">
-              <a:buNone/>
-            </a:pPr>
             <a:r>
               <a:rPr lang="ar-SA" altLang="en-US" sz="4290" dirty="0">
                 <a:solidFill>
@@ -27148,9 +27088,6 @@
               </a:rPr>
               <a:t>ا</a:t>
             </a:r>
-            <a:pPr algn="ctr" indent="0" marL="0">
-              <a:buNone/>
-            </a:pPr>
             <a:r>
               <a:rPr lang="ar-SA" altLang="en-US" sz="6600" dirty="0">
                 <a:solidFill>
@@ -28735,9 +28672,6 @@
               </a:rPr>
               <a:t>غَدَ</a:t>
             </a:r>
-            <a:pPr algn="ctr" indent="0" marL="0">
-              <a:buNone/>
-            </a:pPr>
             <a:r>
               <a:rPr lang="ar-SA" altLang="en-US" sz="5850" dirty="0">
                 <a:solidFill>
@@ -30160,9 +30094,6 @@
               </a:rPr>
               <a:t>عَدَ</a:t>
             </a:r>
-            <a:pPr algn="ctr" indent="0" marL="0">
-              <a:buNone/>
-            </a:pPr>
             <a:r>
               <a:rPr lang="ar-SA" altLang="en-US" sz="5850" dirty="0">
                 <a:solidFill>
@@ -31585,9 +31516,6 @@
               </a:rPr>
               <a:t>يَدَ</a:t>
             </a:r>
-            <a:pPr algn="ctr" indent="0" marL="0">
-              <a:buNone/>
-            </a:pPr>
             <a:r>
               <a:rPr lang="ar-SA" altLang="en-US" sz="5850" dirty="0">
                 <a:solidFill>
@@ -33010,9 +32938,6 @@
               </a:rPr>
               <a:t>دَ</a:t>
             </a:r>
-            <a:pPr algn="ctr" indent="0" marL="0">
-              <a:buNone/>
-            </a:pPr>
             <a:r>
               <a:rPr lang="ar-SA" altLang="en-US" sz="5850" dirty="0">
                 <a:solidFill>
@@ -33024,9 +32949,6 @@
               </a:rPr>
               <a:t>ا</a:t>
             </a:r>
-            <a:pPr algn="ctr" indent="0" marL="0">
-              <a:buNone/>
-            </a:pPr>
             <a:r>
               <a:rPr lang="ar-SA" altLang="en-US" sz="9000" dirty="0">
                 <a:solidFill>
@@ -34449,9 +34371,6 @@
               </a:rPr>
               <a:t>دَ</a:t>
             </a:r>
-            <a:pPr algn="ctr" indent="0" marL="0">
-              <a:buNone/>
-            </a:pPr>
             <a:r>
               <a:rPr lang="ar-SA" altLang="en-US" sz="5850" dirty="0">
                 <a:solidFill>
@@ -34463,9 +34382,6 @@
               </a:rPr>
               <a:t>ا</a:t>
             </a:r>
-            <a:pPr algn="ctr" indent="0" marL="0">
-              <a:buNone/>
-            </a:pPr>
             <a:r>
               <a:rPr lang="ar-SA" altLang="en-US" sz="9000" dirty="0">
                 <a:solidFill>
@@ -35888,9 +35804,6 @@
               </a:rPr>
               <a:t>دَ</a:t>
             </a:r>
-            <a:pPr algn="ctr" indent="0" marL="0">
-              <a:buNone/>
-            </a:pPr>
             <a:r>
               <a:rPr lang="ar-SA" altLang="en-US" sz="5850" dirty="0">
                 <a:solidFill>
@@ -35902,9 +35815,6 @@
               </a:rPr>
               <a:t>ا</a:t>
             </a:r>
-            <a:pPr algn="ctr" indent="0" marL="0">
-              <a:buNone/>
-            </a:pPr>
             <a:r>
               <a:rPr lang="ar-SA" altLang="en-US" sz="9000" dirty="0">
                 <a:solidFill>
